--- a/ContinuationProject/WorkingFolder/DISC DEXPI Custom Equipment Package.pptx
+++ b/ContinuationProject/WorkingFolder/DISC DEXPI Custom Equipment Package.pptx
@@ -202,7 +202,7 @@
           <a:p>
             <a:fld id="{C29BB7E0-E7DF-4D1C-B7E4-FB52107F9D6D}" type="datetimeFigureOut">
               <a:rPr lang="nb-NO" smtClean="0"/>
-              <a:t>25.11.2025</a:t>
+              <a:t>01.12.2025</a:t>
             </a:fld>
             <a:endParaRPr lang="nb-NO"/>
           </a:p>
@@ -658,7 +658,7 @@
                 </a:solidFill>
               </a:rPr>
               <a:pPr/>
-              <a:t>25/11/2025</a:t>
+              <a:t>01/12/2025</a:t>
             </a:fld>
             <a:endParaRPr lang="en-GB" dirty="0">
               <a:solidFill>
@@ -24195,7 +24195,7 @@
                 <a:tabLst/>
                 <a:defRPr/>
               </a:pPr>
-              <a:t>11/25/2025</a:t>
+              <a:t>12/1/2025</a:t>
             </a:fld>
             <a:endParaRPr kumimoji="0" lang="en-US" sz="1000" b="0" i="0" u="none" strike="noStrike" kern="1200" cap="none" spc="0" normalizeH="0" baseline="0" noProof="0">
               <a:ln>
@@ -24533,7 +24533,7 @@
                 </a:solidFill>
               </a:rPr>
               <a:pPr/>
-              <a:t>25/11/2025</a:t>
+              <a:t>01/12/2025</a:t>
             </a:fld>
             <a:endParaRPr lang="en-GB" dirty="0">
               <a:solidFill>
@@ -25855,14 +25855,14 @@
           <p:nvPr>
             <p:extLst>
               <p:ext uri="{D42A27DB-BD31-4B8C-83A1-F6EECF244321}">
-                <p14:modId xmlns:p14="http://schemas.microsoft.com/office/powerpoint/2010/main" val="788772215"/>
+                <p14:modId xmlns:p14="http://schemas.microsoft.com/office/powerpoint/2010/main" val="1002617245"/>
               </p:ext>
             </p:extLst>
           </p:nvPr>
         </p:nvGraphicFramePr>
         <p:xfrm>
           <a:off x="641356" y="2324038"/>
-          <a:ext cx="10797976" cy="3632200"/>
+          <a:ext cx="11125264" cy="3632200"/>
         </p:xfrm>
         <a:graphic>
           <a:graphicData uri="http://schemas.openxmlformats.org/drawingml/2006/table">
@@ -25871,35 +25871,42 @@
                 <a:tableStyleId>{5C22544A-7EE6-4342-B048-85BDC9FD1C3A}</a:tableStyleId>
               </a:tblPr>
               <a:tblGrid>
-                <a:gridCol w="951999">
+                <a:gridCol w="659202">
                   <a:extLst>
                     <a:ext uri="{9D8B030D-6E8A-4147-A177-3AD203B41FA5}">
                       <a16:colId xmlns:a16="http://schemas.microsoft.com/office/drawing/2014/main" val="4238551838"/>
                     </a:ext>
                   </a:extLst>
                 </a:gridCol>
-                <a:gridCol w="3298189">
+                <a:gridCol w="2990088">
                   <a:extLst>
                     <a:ext uri="{9D8B030D-6E8A-4147-A177-3AD203B41FA5}">
                       <a16:colId xmlns:a16="http://schemas.microsoft.com/office/drawing/2014/main" val="4162280692"/>
                     </a:ext>
                   </a:extLst>
                 </a:gridCol>
-                <a:gridCol w="2333121">
+                <a:gridCol w="2100106">
                   <a:extLst>
                     <a:ext uri="{9D8B030D-6E8A-4147-A177-3AD203B41FA5}">
                       <a16:colId xmlns:a16="http://schemas.microsoft.com/office/drawing/2014/main" val="1294218146"/>
                     </a:ext>
                   </a:extLst>
                 </a:gridCol>
-                <a:gridCol w="2254313">
+                <a:gridCol w="1382336">
+                  <a:extLst>
+                    <a:ext uri="{9D8B030D-6E8A-4147-A177-3AD203B41FA5}">
+                      <a16:colId xmlns:a16="http://schemas.microsoft.com/office/drawing/2014/main" val="841879930"/>
+                    </a:ext>
+                  </a:extLst>
+                </a:gridCol>
+                <a:gridCol w="2154683">
                   <a:extLst>
                     <a:ext uri="{9D8B030D-6E8A-4147-A177-3AD203B41FA5}">
                       <a16:colId xmlns:a16="http://schemas.microsoft.com/office/drawing/2014/main" val="200326538"/>
                     </a:ext>
                   </a:extLst>
                 </a:gridCol>
-                <a:gridCol w="1960354">
+                <a:gridCol w="1838849">
                   <a:extLst>
                     <a:ext uri="{9D8B030D-6E8A-4147-A177-3AD203B41FA5}">
                       <a16:colId xmlns:a16="http://schemas.microsoft.com/office/drawing/2014/main" val="2009324644"/>
@@ -25920,7 +25927,7 @@
                       <a:endParaRPr lang="en-GB" sz="1600" dirty="0"/>
                     </a:p>
                   </a:txBody>
-                  <a:tcPr/>
+                  <a:tcPr marL="45720" marR="45720"/>
                 </a:tc>
                 <a:tc>
                   <a:txBody>
@@ -25933,7 +25940,7 @@
                       </a:r>
                     </a:p>
                   </a:txBody>
-                  <a:tcPr/>
+                  <a:tcPr marL="45720" marR="45720"/>
                 </a:tc>
                 <a:tc>
                   <a:txBody>
@@ -25946,7 +25953,20 @@
                       </a:r>
                     </a:p>
                   </a:txBody>
-                  <a:tcPr/>
+                  <a:tcPr marL="45720" marR="45720"/>
+                </a:tc>
+                <a:tc>
+                  <a:txBody>
+                    <a:bodyPr/>
+                    <a:lstStyle/>
+                    <a:p>
+                      <a:r>
+                        <a:rPr lang="en-GB" sz="1600" dirty="0"/>
+                        <a:t>Super Type</a:t>
+                      </a:r>
+                    </a:p>
+                  </a:txBody>
+                  <a:tcPr marL="45720" marR="45720"/>
                 </a:tc>
                 <a:tc>
                   <a:txBody>
@@ -25959,7 +25979,7 @@
                       </a:r>
                     </a:p>
                   </a:txBody>
-                  <a:tcPr/>
+                  <a:tcPr marL="45720" marR="45720"/>
                 </a:tc>
                 <a:tc>
                   <a:txBody>
@@ -25972,7 +25992,7 @@
                       </a:r>
                     </a:p>
                   </a:txBody>
-                  <a:tcPr/>
+                  <a:tcPr marL="45720" marR="45720"/>
                 </a:tc>
                 <a:extLst>
                   <a:ext uri="{0D108BD9-81ED-4DB2-BD59-A6C34878D82A}">
@@ -25980,20 +26000,20 @@
                   </a:ext>
                 </a:extLst>
               </a:tr>
-              <a:tr h="287887">
+              <a:tr h="384106">
                 <a:tc>
                   <a:txBody>
                     <a:bodyPr/>
                     <a:lstStyle/>
                     <a:p>
                       <a:r>
-                        <a:rPr lang="en-GB" sz="1400" dirty="0"/>
+                        <a:rPr lang="en-GB" sz="1200" dirty="0"/>
                         <a:t>ND0044</a:t>
                       </a:r>
-                      <a:endParaRPr lang="en-GB" sz="1600" dirty="0"/>
+                      <a:endParaRPr lang="en-GB" sz="1400" dirty="0"/>
                     </a:p>
                   </a:txBody>
-                  <a:tcPr/>
+                  <a:tcPr marL="45720" marR="45720"/>
                 </a:tc>
                 <a:tc>
                   <a:txBody>
@@ -26048,7 +26068,7 @@
                       <a:endParaRPr lang="en-GB" sz="800" dirty="0"/>
                     </a:p>
                   </a:txBody>
-                  <a:tcPr/>
+                  <a:tcPr marL="45720" marR="45720"/>
                 </a:tc>
                 <a:tc>
                   <a:txBody>
@@ -26062,7 +26082,20 @@
                       <a:endParaRPr lang="en-GB" sz="1400" dirty="0"/>
                     </a:p>
                   </a:txBody>
-                  <a:tcPr/>
+                  <a:tcPr marL="45720" marR="45720"/>
+                </a:tc>
+                <a:tc>
+                  <a:txBody>
+                    <a:bodyPr/>
+                    <a:lstStyle/>
+                    <a:p>
+                      <a:r>
+                        <a:rPr lang="en-GB" sz="1600" dirty="0"/>
+                        <a:t>Equipment</a:t>
+                      </a:r>
+                    </a:p>
+                  </a:txBody>
+                  <a:tcPr marL="45720" marR="45720"/>
                 </a:tc>
                 <a:tc>
                   <a:txBody>
@@ -26096,7 +26129,7 @@
                       <a:endParaRPr lang="en-GB" sz="1100" dirty="0"/>
                     </a:p>
                   </a:txBody>
-                  <a:tcPr/>
+                  <a:tcPr marL="45720" marR="45720"/>
                 </a:tc>
                 <a:tc>
                   <a:txBody>
@@ -26117,7 +26150,7 @@
                       </a:r>
                     </a:p>
                   </a:txBody>
-                  <a:tcPr/>
+                  <a:tcPr marL="45720" marR="45720"/>
                 </a:tc>
                 <a:extLst>
                   <a:ext uri="{0D108BD9-81ED-4DB2-BD59-A6C34878D82A}">
@@ -26132,13 +26165,13 @@
                     <a:lstStyle/>
                     <a:p>
                       <a:r>
-                        <a:rPr lang="en-GB" sz="1400" dirty="0"/>
+                        <a:rPr lang="en-GB" sz="1200" dirty="0"/>
                         <a:t>ND0045</a:t>
                       </a:r>
-                      <a:endParaRPr lang="en-GB" sz="1600" dirty="0"/>
+                      <a:endParaRPr lang="en-GB" sz="1400" dirty="0"/>
                     </a:p>
                   </a:txBody>
-                  <a:tcPr/>
+                  <a:tcPr marL="45720" marR="45720"/>
                 </a:tc>
                 <a:tc>
                   <a:txBody>
@@ -26163,7 +26196,7 @@
                       <a:endParaRPr lang="en-GB" sz="600" dirty="0"/>
                     </a:p>
                   </a:txBody>
-                  <a:tcPr/>
+                  <a:tcPr marL="45720" marR="45720"/>
                 </a:tc>
                 <a:tc>
                   <a:txBody>
@@ -26177,7 +26210,37 @@
                       <a:endParaRPr lang="en-GB" sz="1600" dirty="0"/>
                     </a:p>
                   </a:txBody>
-                  <a:tcPr/>
+                  <a:tcPr marL="45720" marR="45720"/>
+                </a:tc>
+                <a:tc>
+                  <a:txBody>
+                    <a:bodyPr/>
+                    <a:lstStyle/>
+                    <a:p>
+                      <a:pPr marL="0" marR="0" lvl="0" indent="0" algn="l" defTabSz="1219170" rtl="0" eaLnBrk="1" fontAlgn="auto" latinLnBrk="0" hangingPunct="1">
+                        <a:lnSpc>
+                          <a:spcPct val="100000"/>
+                        </a:lnSpc>
+                        <a:spcBef>
+                          <a:spcPts val="0"/>
+                        </a:spcBef>
+                        <a:spcAft>
+                          <a:spcPts val="0"/>
+                        </a:spcAft>
+                        <a:buClrTx/>
+                        <a:buSzTx/>
+                        <a:buFontTx/>
+                        <a:buNone/>
+                        <a:tabLst/>
+                        <a:defRPr/>
+                      </a:pPr>
+                      <a:r>
+                        <a:rPr lang="en-GB" sz="1600" dirty="0"/>
+                        <a:t>Nozzle</a:t>
+                      </a:r>
+                    </a:p>
+                  </a:txBody>
+                  <a:tcPr marL="45720" marR="45720"/>
                 </a:tc>
                 <a:tc>
                   <a:txBody>
@@ -26228,7 +26291,7 @@
                       <a:endParaRPr lang="en-GB" sz="1100" dirty="0"/>
                     </a:p>
                   </a:txBody>
-                  <a:tcPr/>
+                  <a:tcPr marL="45720" marR="45720"/>
                 </a:tc>
                 <a:tc>
                   <a:txBody>
@@ -26241,7 +26304,7 @@
                       </a:r>
                       <a:r>
                         <a:rPr lang="en-GB" sz="1400" dirty="0" err="1"/>
-                        <a:t>JointConnectionID</a:t>
+                        <a:t>ObjectDisplayName</a:t>
                       </a:r>
                       <a:r>
                         <a:rPr lang="en-GB" sz="1400" dirty="0"/>
@@ -26263,7 +26326,7 @@
                       </a:r>
                     </a:p>
                   </a:txBody>
-                  <a:tcPr/>
+                  <a:tcPr marL="45720" marR="45720"/>
                 </a:tc>
                 <a:extLst>
                   <a:ext uri="{0D108BD9-81ED-4DB2-BD59-A6C34878D82A}">
@@ -26278,12 +26341,12 @@
                     <a:lstStyle/>
                     <a:p>
                       <a:r>
-                        <a:rPr lang="en-GB" sz="1400" dirty="0"/>
+                        <a:rPr lang="en-GB" sz="1200" dirty="0"/>
                         <a:t>ND0046</a:t>
                       </a:r>
                     </a:p>
                   </a:txBody>
-                  <a:tcPr/>
+                  <a:tcPr marL="45720" marR="45720"/>
                 </a:tc>
                 <a:tc>
                   <a:txBody>
@@ -26302,7 +26365,7 @@
                       <a:endParaRPr lang="en-GB" sz="800" dirty="0"/>
                     </a:p>
                   </a:txBody>
-                  <a:tcPr/>
+                  <a:tcPr marL="45720" marR="45720"/>
                 </a:tc>
                 <a:tc>
                   <a:txBody>
@@ -26316,7 +26379,37 @@
                       <a:endParaRPr lang="en-GB" sz="1600" dirty="0"/>
                     </a:p>
                   </a:txBody>
-                  <a:tcPr/>
+                  <a:tcPr marL="45720" marR="45720"/>
+                </a:tc>
+                <a:tc>
+                  <a:txBody>
+                    <a:bodyPr/>
+                    <a:lstStyle/>
+                    <a:p>
+                      <a:pPr marL="0" marR="0" lvl="0" indent="0" algn="l" defTabSz="1219170" rtl="0" eaLnBrk="1" fontAlgn="auto" latinLnBrk="0" hangingPunct="1">
+                        <a:lnSpc>
+                          <a:spcPct val="100000"/>
+                        </a:lnSpc>
+                        <a:spcBef>
+                          <a:spcPts val="0"/>
+                        </a:spcBef>
+                        <a:spcAft>
+                          <a:spcPts val="0"/>
+                        </a:spcAft>
+                        <a:buClrTx/>
+                        <a:buSzTx/>
+                        <a:buFontTx/>
+                        <a:buNone/>
+                        <a:tabLst/>
+                        <a:defRPr/>
+                      </a:pPr>
+                      <a:r>
+                        <a:rPr lang="en-GB" sz="1600" dirty="0"/>
+                        <a:t>Nozzle</a:t>
+                      </a:r>
+                    </a:p>
+                  </a:txBody>
+                  <a:tcPr marL="45720" marR="45720"/>
                 </a:tc>
                 <a:tc>
                   <a:txBody>
@@ -26367,7 +26460,7 @@
                       <a:endParaRPr lang="en-GB" sz="1100" dirty="0"/>
                     </a:p>
                   </a:txBody>
-                  <a:tcPr/>
+                  <a:tcPr marL="45720" marR="45720"/>
                 </a:tc>
                 <a:tc>
                   <a:txBody>
@@ -26397,7 +26490,7 @@
                       </a:r>
                       <a:r>
                         <a:rPr lang="en-GB" sz="1400" dirty="0" err="1"/>
-                        <a:t>JointConnectionID</a:t>
+                        <a:t>ObjectDisplayName</a:t>
                       </a:r>
                       <a:r>
                         <a:rPr lang="en-GB" sz="1400" dirty="0"/>
@@ -26408,7 +26501,7 @@
                       <a:endParaRPr lang="en-GB" sz="1600" dirty="0"/>
                     </a:p>
                   </a:txBody>
-                  <a:tcPr/>
+                  <a:tcPr marL="45720" marR="45720"/>
                 </a:tc>
                 <a:extLst>
                   <a:ext uri="{0D108BD9-81ED-4DB2-BD59-A6C34878D82A}">
@@ -26434,7 +26527,7 @@
         </p:nvGrpSpPr>
         <p:grpSpPr>
           <a:xfrm>
-            <a:off x="1810343" y="2733649"/>
+            <a:off x="1333045" y="2734368"/>
             <a:ext cx="2857349" cy="1968626"/>
             <a:chOff x="781008" y="2853565"/>
             <a:chExt cx="2857349" cy="1968626"/>
@@ -27440,15 +27533,6 @@
 </file>
 
 <file path=customXml/item1.xml><?xml version="1.0" encoding="utf-8"?>
-<?mso-contentType ?>
-<FormTemplates xmlns="http://schemas.microsoft.com/sharepoint/v3/contenttype/forms">
-  <Display>DocumentLibraryForm</Display>
-  <Edit>DocumentLibraryForm</Edit>
-  <New>DocumentLibraryForm</New>
-</FormTemplates>
-</file>
-
-<file path=customXml/item2.xml><?xml version="1.0" encoding="utf-8"?>
 <ct:contentTypeSchema xmlns:ct="http://schemas.microsoft.com/office/2006/metadata/contentType" xmlns:ma="http://schemas.microsoft.com/office/2006/metadata/properties/metaAttributes" ct:_="" ma:_="" ma:contentTypeName="Dokument" ma:contentTypeID="0x0101002AEEC351A4009D4C9A8C90838DD9276D" ma:contentTypeVersion="12" ma:contentTypeDescription="Opprett et nytt dokument." ma:contentTypeScope="" ma:versionID="7df4236b6312b431c3445dba8eead04f">
   <xsd:schema xmlns:xsd="http://www.w3.org/2001/XMLSchema" xmlns:xs="http://www.w3.org/2001/XMLSchema" xmlns:p="http://schemas.microsoft.com/office/2006/metadata/properties" xmlns:ns2="0258f282-5487-45a4-862b-451e8aa9d05c" xmlns:ns3="919f9a83-26a8-4db1-a003-1a626c1fdcf6" targetNamespace="http://schemas.microsoft.com/office/2006/metadata/properties" ma:root="true" ma:fieldsID="58251b577def5a487a9a11f7e23b161e" ns2:_="" ns3:_="">
     <xsd:import namespace="0258f282-5487-45a4-862b-451e8aa9d05c"/>
@@ -27665,6 +27749,15 @@
 </ct:contentTypeSchema>
 </file>
 
+<file path=customXml/item2.xml><?xml version="1.0" encoding="utf-8"?>
+<?mso-contentType ?>
+<FormTemplates xmlns="http://schemas.microsoft.com/sharepoint/v3/contenttype/forms">
+  <Display>DocumentLibraryForm</Display>
+  <Edit>DocumentLibraryForm</Edit>
+  <New>DocumentLibraryForm</New>
+</FormTemplates>
+</file>
+
 <file path=customXml/item3.xml><?xml version="1.0" encoding="utf-8"?>
 <p:properties xmlns:p="http://schemas.microsoft.com/office/2006/metadata/properties" xmlns:xsi="http://www.w3.org/2001/XMLSchema-instance" xmlns:pc="http://schemas.microsoft.com/office/infopath/2007/PartnerControls">
   <documentManagement>
@@ -27677,14 +27770,6 @@
 </file>
 
 <file path=customXml/itemProps1.xml><?xml version="1.0" encoding="utf-8"?>
-<ds:datastoreItem xmlns:ds="http://schemas.openxmlformats.org/officeDocument/2006/customXml" ds:itemID="{F5BF37C9-5E7F-4DD0-BC04-A4E592AC0B7A}">
-  <ds:schemaRefs>
-    <ds:schemaRef ds:uri="http://schemas.microsoft.com/sharepoint/v3/contenttype/forms"/>
-  </ds:schemaRefs>
-</ds:datastoreItem>
-</file>
-
-<file path=customXml/itemProps2.xml><?xml version="1.0" encoding="utf-8"?>
 <ds:datastoreItem xmlns:ds="http://schemas.openxmlformats.org/officeDocument/2006/customXml" ds:itemID="{70A9877C-D29E-455C-86A2-523D6BCEE4FA}">
   <ds:schemaRefs>
     <ds:schemaRef ds:uri="http://schemas.microsoft.com/office/2006/metadata/contentType"/>
@@ -27699,6 +27784,14 @@
     <ds:schemaRef ds:uri="http://purl.org/dc/elements/1.1/"/>
     <ds:schemaRef ds:uri="http://purl.org/dc/terms/"/>
     <ds:schemaRef ds:uri="http://schemas.microsoft.com/internal/obd"/>
+  </ds:schemaRefs>
+</ds:datastoreItem>
+</file>
+
+<file path=customXml/itemProps2.xml><?xml version="1.0" encoding="utf-8"?>
+<ds:datastoreItem xmlns:ds="http://schemas.openxmlformats.org/officeDocument/2006/customXml" ds:itemID="{F5BF37C9-5E7F-4DD0-BC04-A4E592AC0B7A}">
+  <ds:schemaRefs>
+    <ds:schemaRef ds:uri="http://schemas.microsoft.com/sharepoint/v3/contenttype/forms"/>
   </ds:schemaRefs>
 </ds:datastoreItem>
 </file>
